--- a/public/fun/pack/pptx/birthdaypro/돌잔치프리미엄_27_돌잡이중심_코퍼차콜.pptx
+++ b/public/fun/pack/pptx/birthdaypro/돌잔치프리미엄_27_돌잡이중심_코퍼차콜.pptx
@@ -112,12 +112,12 @@
   <p:extLst>
     <p:ext uri="{521415D9-36F7-43E2-AB2F-B90AF26B5E84}">
       <p14:sectionLst xmlns:p14="http://schemas.microsoft.com/office/powerpoint/2010/main">
-        <p14:section name="시작" id="{808411A9-1981-4F27-A0F1-206D5621D9B5}">
+        <p14:section name="시작" id="{3EE36D5F-4F47-4ABB-9C21-7CCE9BB7D5B2}">
           <p14:sldIdLst>
             <p14:sldId id="256"/>
           </p14:sldIdLst>
         </p14:section>
-        <p14:section name="본문" id="{78C3C2E9-4FEA-4063-BDB0-8AA2AC4FF091}">
+        <p14:section name="본문" id="{6F4E961E-054F-44A6-9C60-0A6658D36BBE}">
           <p14:sldIdLst>
             <p14:sldId id="257"/>
             <p14:sldId id="258"/>
@@ -125,7 +125,7 @@
             <p14:sldId id="260"/>
           </p14:sldIdLst>
         </p14:section>
-        <p14:section name="마무리" id="{6CFEF860-D836-4089-9E0F-E29E21D919C2}">
+        <p14:section name="마무리" id="{8AD34CCB-8D36-422B-9E14-9F93EDCC0CA0}">
           <p14:sldIdLst>
             <p14:sldId id="261"/>
           </p14:sldIdLst>
@@ -1541,7 +1541,7 @@
             </a:lvl1pPr>
           </a:lstStyle>
           <a:p>
-            <a:fld id="{9E1866BC-A033-4079-942D-936A632494E5}" type="slidenum">
+            <a:fld id="{D600C872-164B-47B3-92AB-AEC713234402}" type="slidenum">
               <a:rPr lang="en-US"/>
               <a:t>‹#›</a:t>
             </a:fld>
@@ -2241,7 +2241,7 @@
             </a:lvl1pPr>
           </a:lstStyle>
           <a:p>
-            <a:fld id="{D6AEE89E-D1CC-47D7-AFC3-20F4628A6E8E}" type="slidenum">
+            <a:fld id="{8E03B01F-44A3-40B2-A713-2760EE7DF56A}" type="slidenum">
               <a:rPr lang="en-US"/>
               <a:t>‹#›</a:t>
             </a:fld>
@@ -2867,7 +2867,7 @@
             </a:lvl1pPr>
           </a:lstStyle>
           <a:p>
-            <a:fld id="{5AA98ED2-4D75-4500-89E2-B8AFB539F7B9}" type="slidenum">
+            <a:fld id="{1DFA6C9C-C226-4BBF-9840-116121A0925B}" type="slidenum">
               <a:rPr lang="en-US"/>
               <a:t>‹#›</a:t>
             </a:fld>
@@ -3742,7 +3742,7 @@
           <a:p>
             <a:r>
               <a:rPr lang="ko-KR"/>
-              <a:t>아기 이름 · 0000. 00. 00</a:t>
+              <a:t>아기 이름 · 날짜 입력</a:t>
             </a:r>
           </a:p>
           <a:p>
@@ -3902,7 +3902,7 @@
           <a:bodyPr/>
           <a:lstStyle/>
           <a:p>
-            <a:fld id="{36A199DF-140C-4980-996F-2BB2CA86CCBF}" type="slidenum">
+            <a:fld id="{CA885D51-9512-4D97-A011-D0D752E269CA}" type="slidenum">
               <a:rPr lang="en-US"/>
               <a:t>‹#›</a:t>
             </a:fld>
@@ -4502,7 +4502,7 @@
           <a:bodyPr/>
           <a:lstStyle/>
           <a:p>
-            <a:fld id="{8784F9B9-F892-4CB9-B008-D33820C6E292}" type="slidenum">
+            <a:fld id="{C354EB58-D178-4C05-B65D-8B708706CDB0}" type="slidenum">
               <a:rPr lang="en-US"/>
               <a:t>‹#›</a:t>
             </a:fld>
@@ -5673,7 +5673,7 @@
           <a:bodyPr/>
           <a:lstStyle/>
           <a:p>
-            <a:fld id="{64C05335-7B63-4855-BD4F-61741AB84913}" type="slidenum">
+            <a:fld id="{5BCCA313-8CC3-49E3-ACAD-F54F84182834}" type="slidenum">
               <a:rPr lang="en-US"/>
               <a:t>‹#›</a:t>
             </a:fld>
@@ -6421,7 +6421,7 @@
           <a:bodyPr/>
           <a:lstStyle/>
           <a:p>
-            <a:fld id="{91C32DC6-3969-47EB-B142-A853EDF17A11}" type="slidenum">
+            <a:fld id="{303FF7C3-D26D-49BB-B225-658F6FA328D5}" type="slidenum">
               <a:rPr lang="en-US"/>
               <a:t>‹#›</a:t>
             </a:fld>
